--- a/TEMPLATE_2_faded_logo.pptx
+++ b/TEMPLATE_2_faded_logo.pptx
@@ -197,7 +197,7 @@
           <a:p>
             <a:fld id="{175B9DE0-307C-44AA-9A14-2F76096277F0}" type="datetimeFigureOut">
               <a:rPr lang="en-IN" smtClean="0"/>
-              <a:t>02-10-2026</a:t>
+              <a:t>12-10-2026</a:t>
             </a:fld>
             <a:endParaRPr lang="en-IN"/>
           </a:p>
@@ -622,7 +622,7 @@
           <a:p>
             <a:fld id="{6EBA79C2-4FE3-4D0C-AFFB-D4FCE050D5EA}" type="datetimeFigureOut">
               <a:rPr lang="en-IN" smtClean="0"/>
-              <a:t>02-10-2026</a:t>
+              <a:t>12-10-2026</a:t>
             </a:fld>
             <a:endParaRPr lang="en-IN"/>
           </a:p>
@@ -859,7 +859,7 @@
           <a:p>
             <a:fld id="{6EBA79C2-4FE3-4D0C-AFFB-D4FCE050D5EA}" type="datetimeFigureOut">
               <a:rPr lang="en-IN" smtClean="0"/>
-              <a:t>02-10-2026</a:t>
+              <a:t>12-10-2026</a:t>
             </a:fld>
             <a:endParaRPr lang="en-IN"/>
           </a:p>
@@ -1069,7 +1069,7 @@
           <a:p>
             <a:fld id="{6EBA79C2-4FE3-4D0C-AFFB-D4FCE050D5EA}" type="datetimeFigureOut">
               <a:rPr lang="en-IN" smtClean="0"/>
-              <a:t>02-10-2026</a:t>
+              <a:t>12-10-2026</a:t>
             </a:fld>
             <a:endParaRPr lang="en-IN"/>
           </a:p>
@@ -1277,7 +1277,7 @@
           <a:p>
             <a:fld id="{6EBA79C2-4FE3-4D0C-AFFB-D4FCE050D5EA}" type="datetimeFigureOut">
               <a:rPr lang="en-IN" smtClean="0"/>
-              <a:t>02-10-2026</a:t>
+              <a:t>12-10-2026</a:t>
             </a:fld>
             <a:endParaRPr lang="en-IN"/>
           </a:p>
@@ -1590,7 +1590,7 @@
           <a:p>
             <a:fld id="{6EBA79C2-4FE3-4D0C-AFFB-D4FCE050D5EA}" type="datetimeFigureOut">
               <a:rPr lang="en-IN" smtClean="0"/>
-              <a:t>02-10-2026</a:t>
+              <a:t>12-10-2026</a:t>
             </a:fld>
             <a:endParaRPr lang="en-IN"/>
           </a:p>
@@ -1858,7 +1858,7 @@
           <a:p>
             <a:fld id="{6EBA79C2-4FE3-4D0C-AFFB-D4FCE050D5EA}" type="datetimeFigureOut">
               <a:rPr lang="en-IN" smtClean="0"/>
-              <a:t>02-10-2026</a:t>
+              <a:t>12-10-2026</a:t>
             </a:fld>
             <a:endParaRPr lang="en-IN"/>
           </a:p>
@@ -2273,7 +2273,7 @@
           <a:p>
             <a:fld id="{6EBA79C2-4FE3-4D0C-AFFB-D4FCE050D5EA}" type="datetimeFigureOut">
               <a:rPr lang="en-IN" smtClean="0"/>
-              <a:t>02-10-2026</a:t>
+              <a:t>12-10-2026</a:t>
             </a:fld>
             <a:endParaRPr lang="en-IN"/>
           </a:p>
@@ -2415,7 +2415,7 @@
           <a:p>
             <a:fld id="{6EBA79C2-4FE3-4D0C-AFFB-D4FCE050D5EA}" type="datetimeFigureOut">
               <a:rPr lang="en-IN" smtClean="0"/>
-              <a:t>02-10-2026</a:t>
+              <a:t>12-10-2026</a:t>
             </a:fld>
             <a:endParaRPr lang="en-IN"/>
           </a:p>
@@ -2528,7 +2528,7 @@
           <a:p>
             <a:fld id="{6EBA79C2-4FE3-4D0C-AFFB-D4FCE050D5EA}" type="datetimeFigureOut">
               <a:rPr lang="en-IN" smtClean="0"/>
-              <a:t>02-10-2026</a:t>
+              <a:t>12-10-2026</a:t>
             </a:fld>
             <a:endParaRPr lang="en-IN"/>
           </a:p>
@@ -2841,7 +2841,7 @@
           <a:p>
             <a:fld id="{6EBA79C2-4FE3-4D0C-AFFB-D4FCE050D5EA}" type="datetimeFigureOut">
               <a:rPr lang="en-IN" smtClean="0"/>
-              <a:t>02-10-2026</a:t>
+              <a:t>12-10-2026</a:t>
             </a:fld>
             <a:endParaRPr lang="en-IN"/>
           </a:p>
@@ -3130,7 +3130,7 @@
           <a:p>
             <a:fld id="{6EBA79C2-4FE3-4D0C-AFFB-D4FCE050D5EA}" type="datetimeFigureOut">
               <a:rPr lang="en-IN" smtClean="0"/>
-              <a:t>02-10-2026</a:t>
+              <a:t>12-10-2026</a:t>
             </a:fld>
             <a:endParaRPr lang="en-IN"/>
           </a:p>
@@ -3366,8 +3366,9 @@
             <a:lvl1pPr algn="l">
               <a:defRPr sz="1200">
                 <a:solidFill>
-                  <a:schemeClr val="tx1">
-                    <a:tint val="75000"/>
+                  <a:schemeClr val="accent6">
+                    <a:lumMod val="60000"/>
+                    <a:lumOff val="40000"/>
                   </a:schemeClr>
                 </a:solidFill>
               </a:defRPr>
@@ -3376,7 +3377,8 @@
           <a:p>
             <a:fld id="{6EBA79C2-4FE3-4D0C-AFFB-D4FCE050D5EA}" type="datetimeFigureOut">
               <a:rPr lang="en-IN" smtClean="0"/>
-              <a:t>02-10-2026</a:t>
+              <a:pPr/>
+              <a:t>12-10-2026</a:t>
             </a:fld>
             <a:endParaRPr lang="en-IN"/>
           </a:p>
@@ -3413,8 +3415,9 @@
             <a:lvl1pPr algn="ctr">
               <a:defRPr sz="1200">
                 <a:solidFill>
-                  <a:schemeClr val="tx1">
-                    <a:tint val="75000"/>
+                  <a:schemeClr val="accent6">
+                    <a:lumMod val="60000"/>
+                    <a:lumOff val="40000"/>
                   </a:schemeClr>
                 </a:solidFill>
               </a:defRPr>
@@ -3456,8 +3459,9 @@
             <a:lvl1pPr algn="r">
               <a:defRPr sz="1200">
                 <a:solidFill>
-                  <a:schemeClr val="tx1">
-                    <a:tint val="75000"/>
+                  <a:schemeClr val="accent6">
+                    <a:lumMod val="60000"/>
+                    <a:lumOff val="40000"/>
                   </a:schemeClr>
                 </a:solidFill>
               </a:defRPr>
@@ -3466,6 +3470,7 @@
           <a:p>
             <a:fld id="{023A53CF-6AA3-4EF6-9F05-A0E3059C583D}" type="slidenum">
               <a:rPr lang="en-IN" smtClean="0"/>
+              <a:pPr/>
               <a:t>‹#›</a:t>
             </a:fld>
             <a:endParaRPr lang="en-IN"/>
@@ -3542,7 +3547,10 @@
         <a:buNone/>
         <a:defRPr sz="4400" kern="1200">
           <a:solidFill>
-            <a:schemeClr val="tx1"/>
+            <a:schemeClr val="accent6">
+              <a:lumMod val="60000"/>
+              <a:lumOff val="40000"/>
+            </a:schemeClr>
           </a:solidFill>
           <a:latin typeface="+mj-lt"/>
           <a:ea typeface="+mj-ea"/>
@@ -3562,7 +3570,10 @@
         <a:buChar char="•"/>
         <a:defRPr sz="2800" kern="1200">
           <a:solidFill>
-            <a:schemeClr val="tx1"/>
+            <a:schemeClr val="accent6">
+              <a:lumMod val="60000"/>
+              <a:lumOff val="40000"/>
+            </a:schemeClr>
           </a:solidFill>
           <a:latin typeface="+mn-lt"/>
           <a:ea typeface="+mn-ea"/>
@@ -3580,7 +3591,10 @@
         <a:buChar char="•"/>
         <a:defRPr sz="2400" kern="1200">
           <a:solidFill>
-            <a:schemeClr val="tx1"/>
+            <a:schemeClr val="accent6">
+              <a:lumMod val="60000"/>
+              <a:lumOff val="40000"/>
+            </a:schemeClr>
           </a:solidFill>
           <a:latin typeface="+mn-lt"/>
           <a:ea typeface="+mn-ea"/>
@@ -3598,7 +3612,10 @@
         <a:buChar char="•"/>
         <a:defRPr sz="2000" kern="1200">
           <a:solidFill>
-            <a:schemeClr val="tx1"/>
+            <a:schemeClr val="accent6">
+              <a:lumMod val="60000"/>
+              <a:lumOff val="40000"/>
+            </a:schemeClr>
           </a:solidFill>
           <a:latin typeface="+mn-lt"/>
           <a:ea typeface="+mn-ea"/>
@@ -3616,7 +3633,10 @@
         <a:buChar char="•"/>
         <a:defRPr sz="1800" kern="1200">
           <a:solidFill>
-            <a:schemeClr val="tx1"/>
+            <a:schemeClr val="accent6">
+              <a:lumMod val="60000"/>
+              <a:lumOff val="40000"/>
+            </a:schemeClr>
           </a:solidFill>
           <a:latin typeface="+mn-lt"/>
           <a:ea typeface="+mn-ea"/>
@@ -3634,7 +3654,10 @@
         <a:buChar char="•"/>
         <a:defRPr sz="1800" kern="1200">
           <a:solidFill>
-            <a:schemeClr val="tx1"/>
+            <a:schemeClr val="accent6">
+              <a:lumMod val="60000"/>
+              <a:lumOff val="40000"/>
+            </a:schemeClr>
           </a:solidFill>
           <a:latin typeface="+mn-lt"/>
           <a:ea typeface="+mn-ea"/>
